--- a/slides/Chapter 09 - Elections and Campaigns (Lecture Deck).pptx
+++ b/slides/Chapter 09 - Elections and Campaigns (Lecture Deck).pptx
@@ -3964,7 +3964,7 @@
         <p:spPr>
           <a:xfrm>
             <a:off x="868680" y="6016752"/>
-            <a:ext cx="10454335" cy="155448"/>
+            <a:ext cx="10454335" cy="201168"/>
           </a:xfrm>
           <a:prstGeom prst="rect">
             <a:avLst/>
@@ -10377,7 +10377,7 @@
         <p:spPr>
           <a:xfrm>
             <a:off x="868680" y="6181344"/>
-            <a:ext cx="10454335" cy="64008"/>
+            <a:ext cx="10454335" cy="201168"/>
           </a:xfrm>
           <a:prstGeom prst="rect">
             <a:avLst/>

--- a/slides/Chapter 09 - Elections and Campaigns (Lecture Deck).pptx
+++ b/slides/Chapter 09 - Elections and Campaigns (Lecture Deck).pptx
@@ -1485,8 +1485,12 @@
               <a:rPr lang="en-US" dirty="0"/>
               <a:t>TIMING: 6 minutes.
 THE MAJORITY RULE IN PRIMARIES matters and students miss it. A primary requires
-more than fifty percent. A general election needs only a plurality. That is why
-Texas holds runoffs after primaries but never after general elections.
+more than fifty percent. A general election for partisan state and federal office
+needs only a plurality. That is why Texas holds runoffs after primaries but not
+after the November general election for those offices. Note the exception
+students will actually encounter: most city and school board charters require a
+majority, so May local elections and special elections to fill vacancies do go
+to runoffs.
 THE MIDTERM TIMING POINT IS THE ANALYTICAL ONE. Texas deliberately elects its
 governor in non-presidential years. The stated rationale was insulating state
 politics from national tides. The consequence is that the officials with the most
@@ -1694,7 +1698,7 @@
 files, a seat with taxing authority is filled by default. A student in this room
 could run.
 INCUMBENCY IS THE STRUCTURAL ADVANTAGE to name here: name recognition, donor
-networks, staff, media access, and in legislative races the franking privilege.
+networks, staff, media access, and in congressional races the franking privilege.
 Challengers start far behind, which is why most incumbents win.</a:t>
             </a:r>
             <a:endParaRPr lang="en-US" dirty="0"/>
@@ -8548,7 +8552,7 @@
                 <a:ea typeface="Calibri" pitchFamily="34" charset="-122"/>
                 <a:cs typeface="Calibri" pitchFamily="34" charset="-120"/>
               </a:rPr>
-              <a:t>November of even years. Fills the office. A plurality wins, so no runoff is needed.</a:t>
+              <a:t>November of even years. Fills the office. For state and federal offices a plurality wins, so no runoff is needed.</a:t>
             </a:r>
             <a:endParaRPr lang="en-US" sz="1250" dirty="0"/>
           </a:p>
@@ -9012,8 +9016,8 @@
         </p:nvSpPr>
         <p:spPr>
           <a:xfrm>
-            <a:off x="905256" y="2221992"/>
-            <a:ext cx="6400800" cy="530352"/>
+            <a:off x="905256" y="2203704"/>
+            <a:ext cx="6400800" cy="566928"/>
           </a:xfrm>
           <a:prstGeom prst="rect">
             <a:avLst/>
@@ -9027,12 +9031,12 @@
           <a:p>
             <a:pPr indent="0" marL="0">
               <a:lnSpc>
-                <a:spcPts val="1600"/>
+                <a:spcPts val="1400"/>
               </a:lnSpc>
               <a:buNone/>
             </a:pPr>
             <a:r>
-              <a:rPr lang="en-US" sz="1250" dirty="0">
+              <a:rPr lang="en-US" sz="1150" dirty="0">
                 <a:solidFill>
                   <a:srgbClr val="1F2933"/>
                 </a:solidFill>
@@ -9040,9 +9044,9 @@
                 <a:ea typeface="Calibri" pitchFamily="34" charset="-122"/>
                 <a:cs typeface="Calibri" pitchFamily="34" charset="-120"/>
               </a:rPr>
-              <a:t>Any registered voter may vote in one party's primary without registering with that party. Texas uses this system.</a:t>
-            </a:r>
-            <a:endParaRPr lang="en-US" sz="1250" dirty="0"/>
+              <a:t>Any registered voter may vote in one party's primary without registering with that party. Texas uses this system, though a primary vote binds you to that party's runoff for the cycle (some call it semi-open).</a:t>
+            </a:r>
+            <a:endParaRPr lang="en-US" sz="1150" dirty="0"/>
           </a:p>
         </p:txBody>
       </p:sp>
@@ -9142,8 +9146,8 @@
         </p:nvSpPr>
         <p:spPr>
           <a:xfrm>
-            <a:off x="905256" y="3364992"/>
-            <a:ext cx="6400800" cy="530352"/>
+            <a:off x="905256" y="3346704"/>
+            <a:ext cx="6400800" cy="566928"/>
           </a:xfrm>
           <a:prstGeom prst="rect">
             <a:avLst/>
@@ -9157,12 +9161,12 @@
           <a:p>
             <a:pPr indent="0" marL="0">
               <a:lnSpc>
-                <a:spcPts val="1600"/>
+                <a:spcPts val="1400"/>
               </a:lnSpc>
               <a:buNone/>
             </a:pPr>
             <a:r>
-              <a:rPr lang="en-US" sz="1250" dirty="0">
+              <a:rPr lang="en-US" sz="1150" dirty="0">
                 <a:solidFill>
                   <a:srgbClr val="1F2933"/>
                 </a:solidFill>
@@ -9172,7 +9176,7 @@
               </a:rPr>
               <a:t>Only voters registered with the party may participate. Common in states with party registration.</a:t>
             </a:r>
-            <a:endParaRPr lang="en-US" sz="1250" dirty="0"/>
+            <a:endParaRPr lang="en-US" sz="1150" dirty="0"/>
           </a:p>
         </p:txBody>
       </p:sp>
@@ -9272,8 +9276,8 @@
         </p:nvSpPr>
         <p:spPr>
           <a:xfrm>
-            <a:off x="905256" y="4507992"/>
-            <a:ext cx="6400800" cy="530352"/>
+            <a:off x="905256" y="4489704"/>
+            <a:ext cx="6400800" cy="566928"/>
           </a:xfrm>
           <a:prstGeom prst="rect">
             <a:avLst/>
@@ -9287,12 +9291,12 @@
           <a:p>
             <a:pPr indent="0" marL="0">
               <a:lnSpc>
-                <a:spcPts val="1600"/>
+                <a:spcPts val="1400"/>
               </a:lnSpc>
               <a:buNone/>
             </a:pPr>
             <a:r>
-              <a:rPr lang="en-US" sz="1250" dirty="0">
+              <a:rPr lang="en-US" sz="1150" dirty="0">
                 <a:solidFill>
                   <a:srgbClr val="1F2933"/>
                 </a:solidFill>
@@ -9300,9 +9304,9 @@
                 <a:ea typeface="Calibri" pitchFamily="34" charset="-122"/>
                 <a:cs typeface="Calibri" pitchFamily="34" charset="-120"/>
               </a:rPr>
-              <a:t>All candidates appear on one ballot regardless of party. The two highest finishers advance, even if they share a party. Used in California and Louisiana.</a:t>
-            </a:r>
-            <a:endParaRPr lang="en-US" sz="1250" dirty="0"/>
+              <a:t>All candidates appear on one ballot regardless of party. The two highest finishers advance, even if they share a party. Used in California and Washington; Louisiana runs a similar all-candidate election with a runoff, though it moved congressional races to closed party primaries in 2026.</a:t>
+            </a:r>
+            <a:endParaRPr lang="en-US" sz="1150" dirty="0"/>
           </a:p>
         </p:txBody>
       </p:sp>
@@ -10296,7 +10300,7 @@
                 <a:ea typeface="Calibri" pitchFamily="34" charset="-122"/>
                 <a:cs typeface="Calibri" pitchFamily="34" charset="-120"/>
               </a:rPr>
-              <a:t>A plurality wins in November. No runoff follows.</a:t>
+              <a:t>For state and federal office a plurality wins in November and no runoff follows; many local offices require a majority.</a:t>
             </a:r>
             <a:endParaRPr lang="en-US" sz="1200" dirty="0"/>
           </a:p>
